--- a/7_KI-Basismodule/KI-B3/KI-B3.4.2_Affenspiel-Folien.pptx
+++ b/7_KI-Basismodule/KI-B3/KI-B3.4.2_Affenspiel-Folien.pptx
@@ -203,7 +203,7 @@
           <a:p>
             <a:fld id="{BB386332-D646-4357-9AF0-E1DBF0D7D806}" type="datetimeFigureOut">
               <a:rPr lang="de-DE" smtClean="0"/>
-              <a:t>27.08.2021</a:t>
+              <a:t>30.06.2023</a:t>
             </a:fld>
             <a:endParaRPr lang="de-DE"/>
           </a:p>
@@ -1056,7 +1056,7 @@
           <a:p>
             <a:fld id="{63562D77-F080-4DAB-A503-2C55E511CB17}" type="datetimeFigureOut">
               <a:rPr lang="de-DE" smtClean="0"/>
-              <a:t>27.08.2021</a:t>
+              <a:t>30.06.2023</a:t>
             </a:fld>
             <a:endParaRPr lang="de-DE"/>
           </a:p>
@@ -1224,7 +1224,7 @@
           <a:p>
             <a:fld id="{63562D77-F080-4DAB-A503-2C55E511CB17}" type="datetimeFigureOut">
               <a:rPr lang="de-DE" smtClean="0"/>
-              <a:t>27.08.2021</a:t>
+              <a:t>30.06.2023</a:t>
             </a:fld>
             <a:endParaRPr lang="de-DE"/>
           </a:p>
@@ -1402,7 +1402,7 @@
           <a:p>
             <a:fld id="{63562D77-F080-4DAB-A503-2C55E511CB17}" type="datetimeFigureOut">
               <a:rPr lang="de-DE" smtClean="0"/>
-              <a:t>27.08.2021</a:t>
+              <a:t>30.06.2023</a:t>
             </a:fld>
             <a:endParaRPr lang="de-DE"/>
           </a:p>
@@ -1902,7 +1902,7 @@
           <a:p>
             <a:fld id="{63562D77-F080-4DAB-A503-2C55E511CB17}" type="datetimeFigureOut">
               <a:rPr lang="de-DE" smtClean="0"/>
-              <a:t>27.08.2021</a:t>
+              <a:t>30.06.2023</a:t>
             </a:fld>
             <a:endParaRPr lang="de-DE"/>
           </a:p>
@@ -2147,7 +2147,7 @@
           <a:p>
             <a:fld id="{63562D77-F080-4DAB-A503-2C55E511CB17}" type="datetimeFigureOut">
               <a:rPr lang="de-DE" smtClean="0"/>
-              <a:t>27.08.2021</a:t>
+              <a:t>30.06.2023</a:t>
             </a:fld>
             <a:endParaRPr lang="de-DE"/>
           </a:p>
@@ -2376,7 +2376,7 @@
           <a:p>
             <a:fld id="{63562D77-F080-4DAB-A503-2C55E511CB17}" type="datetimeFigureOut">
               <a:rPr lang="de-DE" smtClean="0"/>
-              <a:t>27.08.2021</a:t>
+              <a:t>30.06.2023</a:t>
             </a:fld>
             <a:endParaRPr lang="de-DE"/>
           </a:p>
@@ -2740,7 +2740,7 @@
           <a:p>
             <a:fld id="{63562D77-F080-4DAB-A503-2C55E511CB17}" type="datetimeFigureOut">
               <a:rPr lang="de-DE" smtClean="0"/>
-              <a:t>27.08.2021</a:t>
+              <a:t>30.06.2023</a:t>
             </a:fld>
             <a:endParaRPr lang="de-DE"/>
           </a:p>
@@ -2857,7 +2857,7 @@
           <a:p>
             <a:fld id="{63562D77-F080-4DAB-A503-2C55E511CB17}" type="datetimeFigureOut">
               <a:rPr lang="de-DE" smtClean="0"/>
-              <a:t>27.08.2021</a:t>
+              <a:t>30.06.2023</a:t>
             </a:fld>
             <a:endParaRPr lang="de-DE"/>
           </a:p>
@@ -2952,7 +2952,7 @@
           <a:p>
             <a:fld id="{63562D77-F080-4DAB-A503-2C55E511CB17}" type="datetimeFigureOut">
               <a:rPr lang="de-DE" smtClean="0"/>
-              <a:t>27.08.2021</a:t>
+              <a:t>30.06.2023</a:t>
             </a:fld>
             <a:endParaRPr lang="de-DE"/>
           </a:p>
@@ -3227,7 +3227,7 @@
           <a:p>
             <a:fld id="{63562D77-F080-4DAB-A503-2C55E511CB17}" type="datetimeFigureOut">
               <a:rPr lang="de-DE" smtClean="0"/>
-              <a:t>27.08.2021</a:t>
+              <a:t>30.06.2023</a:t>
             </a:fld>
             <a:endParaRPr lang="de-DE"/>
           </a:p>
@@ -3479,7 +3479,7 @@
           <a:p>
             <a:fld id="{63562D77-F080-4DAB-A503-2C55E511CB17}" type="datetimeFigureOut">
               <a:rPr lang="de-DE" smtClean="0"/>
-              <a:t>27.08.2021</a:t>
+              <a:t>30.06.2023</a:t>
             </a:fld>
             <a:endParaRPr lang="de-DE"/>
           </a:p>
@@ -3690,7 +3690,7 @@
           <a:p>
             <a:fld id="{63562D77-F080-4DAB-A503-2C55E511CB17}" type="datetimeFigureOut">
               <a:rPr lang="de-DE" smtClean="0"/>
-              <a:t>27.08.2021</a:t>
+              <a:t>30.06.2023</a:t>
             </a:fld>
             <a:endParaRPr lang="de-DE"/>
           </a:p>
